--- a/app/static/pitch-deck/fenrix_deck.pptx
+++ b/app/static/pitch-deck/fenrix_deck.pptx
@@ -3206,7 +3206,7 @@
               </a:defRPr>
             </a:pPr>
             <a:r>
-              <a:t>• git SHA: dadce86e53c42573 · data mode of record: yfinance · universe: 30 assets</a:t>
+              <a:t>• git SHA: 85abadc8786e71c7 · data mode of record: yfinance · universe: 30 assets</a:t>
             </a:r>
           </a:p>
         </p:txBody>
@@ -4147,7 +4147,7 @@
               </a:defRPr>
             </a:pPr>
             <a:r>
-              <a:t>TIER 2 · yfinance historical (actual run) · git dadce86e53c42573 · evidence-generated · not investment advice</a:t>
+              <a:t>TIER 2 · yfinance historical (actual run) · git 85abadc8786e71c7 · evidence-generated · not investment advice</a:t>
             </a:r>
           </a:p>
         </p:txBody>
@@ -4314,7 +4314,7 @@
               </a:defRPr>
             </a:pPr>
             <a:r>
-              <a:t>TIER 2 · yfinance historical (actual run) · git dadce86e53c42573 · evidence-generated · not investment advice</a:t>
+              <a:t>TIER 2 · yfinance historical (actual run) · git 85abadc8786e71c7 · evidence-generated · not investment advice</a:t>
             </a:r>
           </a:p>
         </p:txBody>
@@ -4493,7 +4493,7 @@
               </a:defRPr>
             </a:pPr>
             <a:r>
-              <a:t>TIER 2 · yfinance historical (actual run) · git dadce86e53c42573 · evidence-generated · not investment advice</a:t>
+              <a:t>TIER 2 · yfinance historical (actual run) · git 85abadc8786e71c7 · evidence-generated · not investment advice</a:t>
             </a:r>
           </a:p>
         </p:txBody>

--- a/app/static/pitch-deck/fenrix_deck.pptx
+++ b/app/static/pitch-deck/fenrix_deck.pptx
@@ -3206,7 +3206,7 @@
               </a:defRPr>
             </a:pPr>
             <a:r>
-              <a:t>• git SHA: 85abadc8786e71c7 · data mode of record: yfinance · universe: 30 assets</a:t>
+              <a:t>• git SHA: 822ef51ebd0601f2 · data mode of record: yfinance · universe: 30 assets</a:t>
             </a:r>
           </a:p>
         </p:txBody>
@@ -4064,7 +4064,7 @@
               </a:defRPr>
             </a:pPr>
             <a:r>
-              <a:t>• Benchmark CAGR n/a · information ratio n/a</a:t>
+              <a:t>• Benchmark CAGR 12.49% · information ratio -0.47</a:t>
             </a:r>
           </a:p>
           <a:p>
@@ -4147,7 +4147,7 @@
               </a:defRPr>
             </a:pPr>
             <a:r>
-              <a:t>TIER 2 · yfinance historical (actual run) · git 85abadc8786e71c7 · evidence-generated · not investment advice</a:t>
+              <a:t>TIER 2 · yfinance historical (actual run) · git 822ef51ebd0601f2 · evidence-generated · not investment advice</a:t>
             </a:r>
           </a:p>
         </p:txBody>
@@ -4314,7 +4314,7 @@
               </a:defRPr>
             </a:pPr>
             <a:r>
-              <a:t>TIER 2 · yfinance historical (actual run) · git 85abadc8786e71c7 · evidence-generated · not investment advice</a:t>
+              <a:t>TIER 2 · yfinance historical (actual run) · git 822ef51ebd0601f2 · evidence-generated · not investment advice</a:t>
             </a:r>
           </a:p>
         </p:txBody>
@@ -4493,7 +4493,7 @@
               </a:defRPr>
             </a:pPr>
             <a:r>
-              <a:t>TIER 2 · yfinance historical (actual run) · git 85abadc8786e71c7 · evidence-generated · not investment advice</a:t>
+              <a:t>TIER 2 · yfinance historical (actual run) · git 822ef51ebd0601f2 · evidence-generated · not investment advice</a:t>
             </a:r>
           </a:p>
         </p:txBody>

--- a/app/static/pitch-deck/fenrix_deck.pptx
+++ b/app/static/pitch-deck/fenrix_deck.pptx
@@ -3206,7 +3206,7 @@
               </a:defRPr>
             </a:pPr>
             <a:r>
-              <a:t>• git SHA: 822ef51ebd0601f2 · data mode of record: yfinance · universe: 30 assets</a:t>
+              <a:t>• git SHA: d012a6c1ee8f2ead · data mode of record: yfinance · universe: 30 assets</a:t>
             </a:r>
           </a:p>
         </p:txBody>
@@ -4147,7 +4147,7 @@
               </a:defRPr>
             </a:pPr>
             <a:r>
-              <a:t>TIER 2 · yfinance historical (actual run) · git 822ef51ebd0601f2 · evidence-generated · not investment advice</a:t>
+              <a:t>TIER 2 · yfinance historical (actual run) · git d012a6c1ee8f2ead · evidence-generated · not investment advice</a:t>
             </a:r>
           </a:p>
         </p:txBody>
@@ -4314,7 +4314,7 @@
               </a:defRPr>
             </a:pPr>
             <a:r>
-              <a:t>TIER 2 · yfinance historical (actual run) · git 822ef51ebd0601f2 · evidence-generated · not investment advice</a:t>
+              <a:t>TIER 2 · yfinance historical (actual run) · git d012a6c1ee8f2ead · evidence-generated · not investment advice</a:t>
             </a:r>
           </a:p>
         </p:txBody>
@@ -4493,7 +4493,7 @@
               </a:defRPr>
             </a:pPr>
             <a:r>
-              <a:t>TIER 2 · yfinance historical (actual run) · git 822ef51ebd0601f2 · evidence-generated · not investment advice</a:t>
+              <a:t>TIER 2 · yfinance historical (actual run) · git d012a6c1ee8f2ead · evidence-generated · not investment advice</a:t>
             </a:r>
           </a:p>
         </p:txBody>

--- a/app/static/pitch-deck/fenrix_deck.pptx
+++ b/app/static/pitch-deck/fenrix_deck.pptx
@@ -3206,7 +3206,7 @@
               </a:defRPr>
             </a:pPr>
             <a:r>
-              <a:t>• git SHA: d012a6c1ee8f2ead · data mode of record: yfinance · universe: 30 assets</a:t>
+              <a:t>• git SHA: 504c6cffde1de3ab · data mode of record: yfinance · universe: 30 assets</a:t>
             </a:r>
           </a:p>
         </p:txBody>
@@ -4147,7 +4147,7 @@
               </a:defRPr>
             </a:pPr>
             <a:r>
-              <a:t>TIER 2 · yfinance historical (actual run) · git d012a6c1ee8f2ead · evidence-generated · not investment advice</a:t>
+              <a:t>TIER 2 · yfinance historical (actual run) · git 504c6cffde1de3ab · evidence-generated · not investment advice</a:t>
             </a:r>
           </a:p>
         </p:txBody>
@@ -4314,7 +4314,7 @@
               </a:defRPr>
             </a:pPr>
             <a:r>
-              <a:t>TIER 2 · yfinance historical (actual run) · git d012a6c1ee8f2ead · evidence-generated · not investment advice</a:t>
+              <a:t>TIER 2 · yfinance historical (actual run) · git 504c6cffde1de3ab · evidence-generated · not investment advice</a:t>
             </a:r>
           </a:p>
         </p:txBody>
@@ -4493,7 +4493,7 @@
               </a:defRPr>
             </a:pPr>
             <a:r>
-              <a:t>TIER 2 · yfinance historical (actual run) · git d012a6c1ee8f2ead · evidence-generated · not investment advice</a:t>
+              <a:t>TIER 2 · yfinance historical (actual run) · git 504c6cffde1de3ab · evidence-generated · not investment advice</a:t>
             </a:r>
           </a:p>
         </p:txBody>

--- a/app/static/pitch-deck/fenrix_deck.pptx
+++ b/app/static/pitch-deck/fenrix_deck.pptx
@@ -3206,7 +3206,7 @@
               </a:defRPr>
             </a:pPr>
             <a:r>
-              <a:t>• git SHA: 504c6cffde1de3ab · data mode of record: yfinance · universe: 30 assets</a:t>
+              <a:t>• git SHA: c2f09189e8c4ca7d · data mode of record: yfinance · universe: 30 assets</a:t>
             </a:r>
           </a:p>
         </p:txBody>
@@ -4147,7 +4147,7 @@
               </a:defRPr>
             </a:pPr>
             <a:r>
-              <a:t>TIER 2 · yfinance historical (actual run) · git 504c6cffde1de3ab · evidence-generated · not investment advice</a:t>
+              <a:t>TIER 2 · yfinance historical (actual run) · git c2f09189e8c4ca7d · evidence-generated · not investment advice</a:t>
             </a:r>
           </a:p>
         </p:txBody>
@@ -4314,7 +4314,7 @@
               </a:defRPr>
             </a:pPr>
             <a:r>
-              <a:t>TIER 2 · yfinance historical (actual run) · git 504c6cffde1de3ab · evidence-generated · not investment advice</a:t>
+              <a:t>TIER 2 · yfinance historical (actual run) · git c2f09189e8c4ca7d · evidence-generated · not investment advice</a:t>
             </a:r>
           </a:p>
         </p:txBody>
@@ -4493,7 +4493,7 @@
               </a:defRPr>
             </a:pPr>
             <a:r>
-              <a:t>TIER 2 · yfinance historical (actual run) · git 504c6cffde1de3ab · evidence-generated · not investment advice</a:t>
+              <a:t>TIER 2 · yfinance historical (actual run) · git c2f09189e8c4ca7d · evidence-generated · not investment advice</a:t>
             </a:r>
           </a:p>
         </p:txBody>

--- a/app/static/pitch-deck/fenrix_deck.pptx
+++ b/app/static/pitch-deck/fenrix_deck.pptx
@@ -3206,7 +3206,7 @@
               </a:defRPr>
             </a:pPr>
             <a:r>
-              <a:t>• git SHA: c2f09189e8c4ca7d · data mode of record: yfinance · universe: 30 assets</a:t>
+              <a:t>• git SHA: 8e659ca5e4c5839225b43f8815d557272ebb602e · data mode of record: yfinance · universe: 30 assets</a:t>
             </a:r>
           </a:p>
         </p:txBody>
@@ -4147,7 +4147,7 @@
               </a:defRPr>
             </a:pPr>
             <a:r>
-              <a:t>TIER 2 · yfinance historical (actual run) · git c2f09189e8c4ca7d · evidence-generated · not investment advice</a:t>
+              <a:t>TIER 2 · yfinance historical (actual run) · git 8e659ca5e4c5839225b43f8815d557272ebb602e · evidence-generated · not investment advice</a:t>
             </a:r>
           </a:p>
         </p:txBody>
@@ -4267,7 +4267,7 @@
               </a:defRPr>
             </a:pPr>
             <a:r>
-              <a:t>• Sealed stress search: 21 confirmed failures out of 24 worlds (87.50% failure rate).</a:t>
+              <a:t>• Sealed stress search: 7 confirmed failures out of 24 worlds (29.17% failure rate).</a:t>
             </a:r>
           </a:p>
           <a:p>
@@ -4279,7 +4279,7 @@
               </a:defRPr>
             </a:pPr>
             <a:r>
-              <a:t>• Confirmed-failure mechanisms: borrow_cost_increase, correlation_breakdown, delayed_rebalance, missing_data_shock, momentum_reversal, short_unavailability, slippage_inflation, spread_inflation, universe_churn, volatility_expansion.</a:t>
+              <a:t>• Confirmed-failure mechanisms: borrow_cost_increase, slippage_inflation, spread_inflation, volatility_expansion.</a:t>
             </a:r>
           </a:p>
         </p:txBody>
@@ -4314,7 +4314,7 @@
               </a:defRPr>
             </a:pPr>
             <a:r>
-              <a:t>TIER 2 · yfinance historical (actual run) · git c2f09189e8c4ca7d · evidence-generated · not investment advice</a:t>
+              <a:t>TIER 2 · yfinance historical (actual run) · git 8e659ca5e4c5839225b43f8815d557272ebb602e · evidence-generated · not investment advice</a:t>
             </a:r>
           </a:p>
         </p:txBody>
@@ -4422,7 +4422,7 @@
               </a:defRPr>
             </a:pPr>
             <a:r>
-              <a:t>• Mechanism: momentum_reversal · seed n/a.</a:t>
+              <a:t>• Mechanism: volatility_expansion · seed 20264.</a:t>
             </a:r>
           </a:p>
           <a:p>
@@ -4434,7 +4434,7 @@
               </a:defRPr>
             </a:pPr>
             <a:r>
-              <a:t>• Intensity minimized 1.449 → 0.0057 and it STILL fails: True.</a:t>
+              <a:t>• Intensity minimized 1.038 → 0.8758 and it STILL fails: True.</a:t>
             </a:r>
           </a:p>
           <a:p>
@@ -4493,7 +4493,7 @@
               </a:defRPr>
             </a:pPr>
             <a:r>
-              <a:t>TIER 2 · yfinance historical (actual run) · git c2f09189e8c4ca7d · evidence-generated · not investment advice</a:t>
+              <a:t>TIER 2 · yfinance historical (actual run) · git 8e659ca5e4c5839225b43f8815d557272ebb602e · evidence-generated · not investment advice</a:t>
             </a:r>
           </a:p>
         </p:txBody>

--- a/app/static/pitch-deck/fenrix_deck.pptx
+++ b/app/static/pitch-deck/fenrix_deck.pptx
@@ -3206,7 +3206,7 @@
               </a:defRPr>
             </a:pPr>
             <a:r>
-              <a:t>• git SHA: 8e659ca5e4c5839225b43f8815d557272ebb602e · data mode of record: yfinance · universe: 30 assets</a:t>
+              <a:t>• git SHA: 0327c8b7c6ebf0bd599d15aef6c69b1bf15f5090 · data mode of record: yfinance · universe: 30 assets</a:t>
             </a:r>
           </a:p>
         </p:txBody>
@@ -4147,7 +4147,7 @@
               </a:defRPr>
             </a:pPr>
             <a:r>
-              <a:t>TIER 2 · yfinance historical (actual run) · git 8e659ca5e4c5839225b43f8815d557272ebb602e · evidence-generated · not investment advice</a:t>
+              <a:t>TIER 2 · yfinance historical (actual run) · git 0327c8b7c6ebf0bd599d15aef6c69b1bf15f5090 · evidence-generated · not investment advice</a:t>
             </a:r>
           </a:p>
         </p:txBody>
@@ -4314,7 +4314,7 @@
               </a:defRPr>
             </a:pPr>
             <a:r>
-              <a:t>TIER 2 · yfinance historical (actual run) · git 8e659ca5e4c5839225b43f8815d557272ebb602e · evidence-generated · not investment advice</a:t>
+              <a:t>TIER 2 · yfinance historical (actual run) · git 0327c8b7c6ebf0bd599d15aef6c69b1bf15f5090 · evidence-generated · not investment advice</a:t>
             </a:r>
           </a:p>
         </p:txBody>
@@ -4493,7 +4493,7 @@
               </a:defRPr>
             </a:pPr>
             <a:r>
-              <a:t>TIER 2 · yfinance historical (actual run) · git 8e659ca5e4c5839225b43f8815d557272ebb602e · evidence-generated · not investment advice</a:t>
+              <a:t>TIER 2 · yfinance historical (actual run) · git 0327c8b7c6ebf0bd599d15aef6c69b1bf15f5090 · evidence-generated · not investment advice</a:t>
             </a:r>
           </a:p>
         </p:txBody>

--- a/app/static/pitch-deck/fenrix_deck.pptx
+++ b/app/static/pitch-deck/fenrix_deck.pptx
@@ -3206,7 +3206,7 @@
               </a:defRPr>
             </a:pPr>
             <a:r>
-              <a:t>• git SHA: 0327c8b7c6ebf0bd599d15aef6c69b1bf15f5090 · data mode of record: yfinance · universe: 30 assets</a:t>
+              <a:t>• git SHA: 0170603adfc3dfc19fce4bc8440a32423e9ea557 · data mode of record: yfinance · universe: 30 assets</a:t>
             </a:r>
           </a:p>
         </p:txBody>
@@ -4147,7 +4147,7 @@
               </a:defRPr>
             </a:pPr>
             <a:r>
-              <a:t>TIER 2 · yfinance historical (actual run) · git 0327c8b7c6ebf0bd599d15aef6c69b1bf15f5090 · evidence-generated · not investment advice</a:t>
+              <a:t>TIER 2 · yfinance historical (actual run) · git 0170603adfc3dfc19fce4bc8440a32423e9ea557 · evidence-generated · not investment advice</a:t>
             </a:r>
           </a:p>
         </p:txBody>
@@ -4314,7 +4314,7 @@
               </a:defRPr>
             </a:pPr>
             <a:r>
-              <a:t>TIER 2 · yfinance historical (actual run) · git 0327c8b7c6ebf0bd599d15aef6c69b1bf15f5090 · evidence-generated · not investment advice</a:t>
+              <a:t>TIER 2 · yfinance historical (actual run) · git 0170603adfc3dfc19fce4bc8440a32423e9ea557 · evidence-generated · not investment advice</a:t>
             </a:r>
           </a:p>
         </p:txBody>
@@ -4493,7 +4493,7 @@
               </a:defRPr>
             </a:pPr>
             <a:r>
-              <a:t>TIER 2 · yfinance historical (actual run) · git 0327c8b7c6ebf0bd599d15aef6c69b1bf15f5090 · evidence-generated · not investment advice</a:t>
+              <a:t>TIER 2 · yfinance historical (actual run) · git 0170603adfc3dfc19fce4bc8440a32423e9ea557 · evidence-generated · not investment advice</a:t>
             </a:r>
           </a:p>
         </p:txBody>

--- a/app/static/pitch-deck/fenrix_deck.pptx
+++ b/app/static/pitch-deck/fenrix_deck.pptx
@@ -3206,7 +3206,7 @@
               </a:defRPr>
             </a:pPr>
             <a:r>
-              <a:t>• git SHA: 0170603adfc3dfc19fce4bc8440a32423e9ea557 · data mode of record: yfinance · universe: 30 assets</a:t>
+              <a:t>• git SHA: 49e98cdff0cf647c0dbe98687352d016aed10c38 · data mode of record: yfinance · universe: 30 assets</a:t>
             </a:r>
           </a:p>
         </p:txBody>
@@ -4147,7 +4147,7 @@
               </a:defRPr>
             </a:pPr>
             <a:r>
-              <a:t>TIER 2 · yfinance historical (actual run) · git 0170603adfc3dfc19fce4bc8440a32423e9ea557 · evidence-generated · not investment advice</a:t>
+              <a:t>TIER 2 · yfinance historical (actual run) · git 49e98cdff0cf647c0dbe98687352d016aed10c38 · evidence-generated · not investment advice</a:t>
             </a:r>
           </a:p>
         </p:txBody>
@@ -4314,7 +4314,7 @@
               </a:defRPr>
             </a:pPr>
             <a:r>
-              <a:t>TIER 2 · yfinance historical (actual run) · git 0170603adfc3dfc19fce4bc8440a32423e9ea557 · evidence-generated · not investment advice</a:t>
+              <a:t>TIER 2 · yfinance historical (actual run) · git 49e98cdff0cf647c0dbe98687352d016aed10c38 · evidence-generated · not investment advice</a:t>
             </a:r>
           </a:p>
         </p:txBody>
@@ -4493,7 +4493,7 @@
               </a:defRPr>
             </a:pPr>
             <a:r>
-              <a:t>TIER 2 · yfinance historical (actual run) · git 0170603adfc3dfc19fce4bc8440a32423e9ea557 · evidence-generated · not investment advice</a:t>
+              <a:t>TIER 2 · yfinance historical (actual run) · git 49e98cdff0cf647c0dbe98687352d016aed10c38 · evidence-generated · not investment advice</a:t>
             </a:r>
           </a:p>
         </p:txBody>

--- a/app/static/pitch-deck/fenrix_deck.pptx
+++ b/app/static/pitch-deck/fenrix_deck.pptx
@@ -3206,7 +3206,7 @@
               </a:defRPr>
             </a:pPr>
             <a:r>
-              <a:t>• git SHA: 49e98cdff0cf647c0dbe98687352d016aed10c38 · data mode of record: yfinance · universe: 30 assets</a:t>
+              <a:t>• git SHA: 4047c245bd417aaa6c31e083d57747197f22e9cc · data mode of record: yfinance · universe: 30 assets</a:t>
             </a:r>
           </a:p>
         </p:txBody>
@@ -4147,7 +4147,7 @@
               </a:defRPr>
             </a:pPr>
             <a:r>
-              <a:t>TIER 2 · yfinance historical (actual run) · git 49e98cdff0cf647c0dbe98687352d016aed10c38 · evidence-generated · not investment advice</a:t>
+              <a:t>TIER 2 · yfinance historical (actual run) · git 4047c245bd417aaa6c31e083d57747197f22e9cc · evidence-generated · not investment advice</a:t>
             </a:r>
           </a:p>
         </p:txBody>
@@ -4314,7 +4314,7 @@
               </a:defRPr>
             </a:pPr>
             <a:r>
-              <a:t>TIER 2 · yfinance historical (actual run) · git 49e98cdff0cf647c0dbe98687352d016aed10c38 · evidence-generated · not investment advice</a:t>
+              <a:t>TIER 2 · yfinance historical (actual run) · git 4047c245bd417aaa6c31e083d57747197f22e9cc · evidence-generated · not investment advice</a:t>
             </a:r>
           </a:p>
         </p:txBody>
@@ -4493,7 +4493,7 @@
               </a:defRPr>
             </a:pPr>
             <a:r>
-              <a:t>TIER 2 · yfinance historical (actual run) · git 49e98cdff0cf647c0dbe98687352d016aed10c38 · evidence-generated · not investment advice</a:t>
+              <a:t>TIER 2 · yfinance historical (actual run) · git 4047c245bd417aaa6c31e083d57747197f22e9cc · evidence-generated · not investment advice</a:t>
             </a:r>
           </a:p>
         </p:txBody>

--- a/app/static/pitch-deck/fenrix_deck.pptx
+++ b/app/static/pitch-deck/fenrix_deck.pptx
@@ -3206,7 +3206,7 @@
               </a:defRPr>
             </a:pPr>
             <a:r>
-              <a:t>• git SHA: 4047c245bd417aaa6c31e083d57747197f22e9cc · data mode of record: yfinance · universe: 30 assets</a:t>
+              <a:t>• git SHA: 07bbbcfa9242ec07a19bb30fb54e4880de94ae56 · data mode of record: yfinance · universe: 30 assets</a:t>
             </a:r>
           </a:p>
         </p:txBody>
@@ -4147,7 +4147,7 @@
               </a:defRPr>
             </a:pPr>
             <a:r>
-              <a:t>TIER 2 · yfinance historical (actual run) · git 4047c245bd417aaa6c31e083d57747197f22e9cc · evidence-generated · not investment advice</a:t>
+              <a:t>TIER 2 · yfinance historical (actual run) · git 07bbbcfa9242ec07a19bb30fb54e4880de94ae56 · evidence-generated · not investment advice</a:t>
             </a:r>
           </a:p>
         </p:txBody>
@@ -4314,7 +4314,7 @@
               </a:defRPr>
             </a:pPr>
             <a:r>
-              <a:t>TIER 2 · yfinance historical (actual run) · git 4047c245bd417aaa6c31e083d57747197f22e9cc · evidence-generated · not investment advice</a:t>
+              <a:t>TIER 2 · yfinance historical (actual run) · git 07bbbcfa9242ec07a19bb30fb54e4880de94ae56 · evidence-generated · not investment advice</a:t>
             </a:r>
           </a:p>
         </p:txBody>
@@ -4493,7 +4493,7 @@
               </a:defRPr>
             </a:pPr>
             <a:r>
-              <a:t>TIER 2 · yfinance historical (actual run) · git 4047c245bd417aaa6c31e083d57747197f22e9cc · evidence-generated · not investment advice</a:t>
+              <a:t>TIER 2 · yfinance historical (actual run) · git 07bbbcfa9242ec07a19bb30fb54e4880de94ae56 · evidence-generated · not investment advice</a:t>
             </a:r>
           </a:p>
         </p:txBody>

--- a/app/static/pitch-deck/fenrix_deck.pptx
+++ b/app/static/pitch-deck/fenrix_deck.pptx
@@ -3206,7 +3206,7 @@
               </a:defRPr>
             </a:pPr>
             <a:r>
-              <a:t>• git SHA: 07bbbcfa9242ec07a19bb30fb54e4880de94ae56 · data mode of record: yfinance · universe: 30 assets</a:t>
+              <a:t>• git SHA: fc5c381498c273e12f779f6ddb2ec761eab09c01 · data mode of record: yfinance · universe: 30 assets</a:t>
             </a:r>
           </a:p>
         </p:txBody>
@@ -4147,7 +4147,7 @@
               </a:defRPr>
             </a:pPr>
             <a:r>
-              <a:t>TIER 2 · yfinance historical (actual run) · git 07bbbcfa9242ec07a19bb30fb54e4880de94ae56 · evidence-generated · not investment advice</a:t>
+              <a:t>TIER 2 · yfinance historical (actual run) · git fc5c381498c273e12f779f6ddb2ec761eab09c01 · evidence-generated · not investment advice</a:t>
             </a:r>
           </a:p>
         </p:txBody>
@@ -4314,7 +4314,7 @@
               </a:defRPr>
             </a:pPr>
             <a:r>
-              <a:t>TIER 2 · yfinance historical (actual run) · git 07bbbcfa9242ec07a19bb30fb54e4880de94ae56 · evidence-generated · not investment advice</a:t>
+              <a:t>TIER 2 · yfinance historical (actual run) · git fc5c381498c273e12f779f6ddb2ec761eab09c01 · evidence-generated · not investment advice</a:t>
             </a:r>
           </a:p>
         </p:txBody>
@@ -4493,7 +4493,7 @@
               </a:defRPr>
             </a:pPr>
             <a:r>
-              <a:t>TIER 2 · yfinance historical (actual run) · git 07bbbcfa9242ec07a19bb30fb54e4880de94ae56 · evidence-generated · not investment advice</a:t>
+              <a:t>TIER 2 · yfinance historical (actual run) · git fc5c381498c273e12f779f6ddb2ec761eab09c01 · evidence-generated · not investment advice</a:t>
             </a:r>
           </a:p>
         </p:txBody>

--- a/app/static/pitch-deck/fenrix_deck.pptx
+++ b/app/static/pitch-deck/fenrix_deck.pptx
@@ -3206,7 +3206,7 @@
               </a:defRPr>
             </a:pPr>
             <a:r>
-              <a:t>• git SHA: fc5c381498c273e12f779f6ddb2ec761eab09c01 · data mode of record: yfinance · universe: 30 assets</a:t>
+              <a:t>• git SHA: cca77ab791b12e9e98dd4874a6d466c0f8ea304e · data mode of record: yfinance · universe: 30 assets</a:t>
             </a:r>
           </a:p>
         </p:txBody>
@@ -4147,7 +4147,7 @@
               </a:defRPr>
             </a:pPr>
             <a:r>
-              <a:t>TIER 2 · yfinance historical (actual run) · git fc5c381498c273e12f779f6ddb2ec761eab09c01 · evidence-generated · not investment advice</a:t>
+              <a:t>TIER 2 · yfinance historical (actual run) · git cca77ab791b12e9e98dd4874a6d466c0f8ea304e · evidence-generated · not investment advice</a:t>
             </a:r>
           </a:p>
         </p:txBody>
@@ -4314,7 +4314,7 @@
               </a:defRPr>
             </a:pPr>
             <a:r>
-              <a:t>TIER 2 · yfinance historical (actual run) · git fc5c381498c273e12f779f6ddb2ec761eab09c01 · evidence-generated · not investment advice</a:t>
+              <a:t>TIER 2 · yfinance historical (actual run) · git cca77ab791b12e9e98dd4874a6d466c0f8ea304e · evidence-generated · not investment advice</a:t>
             </a:r>
           </a:p>
         </p:txBody>
@@ -4493,7 +4493,7 @@
               </a:defRPr>
             </a:pPr>
             <a:r>
-              <a:t>TIER 2 · yfinance historical (actual run) · git fc5c381498c273e12f779f6ddb2ec761eab09c01 · evidence-generated · not investment advice</a:t>
+              <a:t>TIER 2 · yfinance historical (actual run) · git cca77ab791b12e9e98dd4874a6d466c0f8ea304e · evidence-generated · not investment advice</a:t>
             </a:r>
           </a:p>
         </p:txBody>

--- a/app/static/pitch-deck/fenrix_deck.pptx
+++ b/app/static/pitch-deck/fenrix_deck.pptx
@@ -3206,7 +3206,7 @@
               </a:defRPr>
             </a:pPr>
             <a:r>
-              <a:t>• git SHA: cca77ab791b12e9e98dd4874a6d466c0f8ea304e · data mode of record: yfinance · universe: 30 assets</a:t>
+              <a:t>• git SHA: c37f5c67e691235c341bd38e1b2553ef76a951ee · data mode of record: yfinance · universe: 30 assets</a:t>
             </a:r>
           </a:p>
         </p:txBody>
@@ -4147,7 +4147,7 @@
               </a:defRPr>
             </a:pPr>
             <a:r>
-              <a:t>TIER 2 · yfinance historical (actual run) · git cca77ab791b12e9e98dd4874a6d466c0f8ea304e · evidence-generated · not investment advice</a:t>
+              <a:t>TIER 2 · yfinance historical (actual run) · git c37f5c67e691235c341bd38e1b2553ef76a951ee · evidence-generated · not investment advice</a:t>
             </a:r>
           </a:p>
         </p:txBody>
@@ -4314,7 +4314,7 @@
               </a:defRPr>
             </a:pPr>
             <a:r>
-              <a:t>TIER 2 · yfinance historical (actual run) · git cca77ab791b12e9e98dd4874a6d466c0f8ea304e · evidence-generated · not investment advice</a:t>
+              <a:t>TIER 2 · yfinance historical (actual run) · git c37f5c67e691235c341bd38e1b2553ef76a951ee · evidence-generated · not investment advice</a:t>
             </a:r>
           </a:p>
         </p:txBody>
@@ -4493,7 +4493,7 @@
               </a:defRPr>
             </a:pPr>
             <a:r>
-              <a:t>TIER 2 · yfinance historical (actual run) · git cca77ab791b12e9e98dd4874a6d466c0f8ea304e · evidence-generated · not investment advice</a:t>
+              <a:t>TIER 2 · yfinance historical (actual run) · git c37f5c67e691235c341bd38e1b2553ef76a951ee · evidence-generated · not investment advice</a:t>
             </a:r>
           </a:p>
         </p:txBody>

--- a/app/static/pitch-deck/fenrix_deck.pptx
+++ b/app/static/pitch-deck/fenrix_deck.pptx
@@ -3206,7 +3206,7 @@
               </a:defRPr>
             </a:pPr>
             <a:r>
-              <a:t>• git SHA: c37f5c67e691235c341bd38e1b2553ef76a951ee · data mode of record: yfinance · universe: 30 assets</a:t>
+              <a:t>• git SHA: ac11b8068a88dcf3bcd7d66295c80ad741f7c355 · data mode of record: yfinance · universe: 30 assets</a:t>
             </a:r>
           </a:p>
         </p:txBody>
@@ -4147,7 +4147,7 @@
               </a:defRPr>
             </a:pPr>
             <a:r>
-              <a:t>TIER 2 · yfinance historical (actual run) · git c37f5c67e691235c341bd38e1b2553ef76a951ee · evidence-generated · not investment advice</a:t>
+              <a:t>TIER 2 · yfinance historical (actual run) · git ac11b8068a88dcf3bcd7d66295c80ad741f7c355 · evidence-generated · not investment advice</a:t>
             </a:r>
           </a:p>
         </p:txBody>
@@ -4314,7 +4314,7 @@
               </a:defRPr>
             </a:pPr>
             <a:r>
-              <a:t>TIER 2 · yfinance historical (actual run) · git c37f5c67e691235c341bd38e1b2553ef76a951ee · evidence-generated · not investment advice</a:t>
+              <a:t>TIER 2 · yfinance historical (actual run) · git ac11b8068a88dcf3bcd7d66295c80ad741f7c355 · evidence-generated · not investment advice</a:t>
             </a:r>
           </a:p>
         </p:txBody>
@@ -4493,7 +4493,7 @@
               </a:defRPr>
             </a:pPr>
             <a:r>
-              <a:t>TIER 2 · yfinance historical (actual run) · git c37f5c67e691235c341bd38e1b2553ef76a951ee · evidence-generated · not investment advice</a:t>
+              <a:t>TIER 2 · yfinance historical (actual run) · git ac11b8068a88dcf3bcd7d66295c80ad741f7c355 · evidence-generated · not investment advice</a:t>
             </a:r>
           </a:p>
         </p:txBody>

--- a/app/static/pitch-deck/fenrix_deck.pptx
+++ b/app/static/pitch-deck/fenrix_deck.pptx
@@ -3206,7 +3206,7 @@
               </a:defRPr>
             </a:pPr>
             <a:r>
-              <a:t>• git SHA: ac11b8068a88dcf3bcd7d66295c80ad741f7c355 · data mode of record: yfinance · universe: 30 assets</a:t>
+              <a:t>• git SHA: 31a4e495807f486255757cc7a0c85e6e58932771 · data mode of record: yfinance · universe: 30 assets</a:t>
             </a:r>
           </a:p>
         </p:txBody>
@@ -3770,7 +3770,7 @@
               </a:defRPr>
             </a:pPr>
             <a:r>
-              <a:t>10.47%</a:t>
+              <a:t>13.07%</a:t>
             </a:r>
           </a:p>
           <a:p>
@@ -3817,7 +3817,7 @@
               </a:defRPr>
             </a:pPr>
             <a:r>
-              <a:t>0.16</a:t>
+              <a:t>0.18</a:t>
             </a:r>
           </a:p>
           <a:p>
@@ -3864,7 +3864,7 @@
               </a:defRPr>
             </a:pPr>
             <a:r>
-              <a:t>-26.82%</a:t>
+              <a:t>-26.75%</a:t>
             </a:r>
           </a:p>
           <a:p>
@@ -3958,7 +3958,7 @@
               </a:defRPr>
             </a:pPr>
             <a:r>
-              <a:t>15.40%</a:t>
+              <a:t>14.03%</a:t>
             </a:r>
           </a:p>
           <a:p>
@@ -4052,7 +4052,7 @@
               </a:defRPr>
             </a:pPr>
             <a:r>
-              <a:t>• CAGR 1.26% · Sortino 0.20 · Calmar 0.05</a:t>
+              <a:t>• CAGR 1.55% · Sortino 0.22 · Calmar 0.06</a:t>
             </a:r>
           </a:p>
           <a:p>
@@ -4064,7 +4064,7 @@
               </a:defRPr>
             </a:pPr>
             <a:r>
-              <a:t>• Benchmark CAGR 12.49% · information ratio -0.47</a:t>
+              <a:t>• Benchmark CAGR 12.49% · information ratio -0.46</a:t>
             </a:r>
           </a:p>
           <a:p>
@@ -4076,7 +4076,7 @@
               </a:defRPr>
             </a:pPr>
             <a:r>
-              <a:t>• Gross exposure avg 109.52% · net exposure avg 0.00%</a:t>
+              <a:t>• Gross exposure avg 103.70% · net exposure avg 0.00%</a:t>
             </a:r>
           </a:p>
           <a:p>
@@ -4147,7 +4147,7 @@
               </a:defRPr>
             </a:pPr>
             <a:r>
-              <a:t>TIER 2 · yfinance historical (actual run) · git ac11b8068a88dcf3bcd7d66295c80ad741f7c355 · evidence-generated · not investment advice</a:t>
+              <a:t>TIER 2 · yfinance historical (actual run) · git 31a4e495807f486255757cc7a0c85e6e58932771 · evidence-generated · not investment advice</a:t>
             </a:r>
           </a:p>
         </p:txBody>
@@ -4255,7 +4255,7 @@
               </a:defRPr>
             </a:pPr>
             <a:r>
-              <a:t>• Baseline (Real historical backtest (yfinance)): Sharpe 0.16, max drawdown -26.82%, cumulative return 10.47%.</a:t>
+              <a:t>• Baseline (Real historical backtest (yfinance)): Sharpe 0.18, max drawdown -26.75%, cumulative return 13.07%.</a:t>
             </a:r>
           </a:p>
           <a:p>
@@ -4267,7 +4267,7 @@
               </a:defRPr>
             </a:pPr>
             <a:r>
-              <a:t>• Sealed stress search: 7 confirmed failures out of 24 worlds (29.17% failure rate).</a:t>
+              <a:t>• Sealed stress search: 8 confirmed failures out of 24 worlds (33.33% failure rate).</a:t>
             </a:r>
           </a:p>
           <a:p>
@@ -4279,7 +4279,7 @@
               </a:defRPr>
             </a:pPr>
             <a:r>
-              <a:t>• Confirmed-failure mechanisms: borrow_cost_increase, slippage_inflation, spread_inflation, volatility_expansion.</a:t>
+              <a:t>• Confirmed-failure mechanisms: borrow_cost_increase, correlation_breakdown, slippage_inflation, volatility_expansion.</a:t>
             </a:r>
           </a:p>
         </p:txBody>
@@ -4314,7 +4314,7 @@
               </a:defRPr>
             </a:pPr>
             <a:r>
-              <a:t>TIER 2 · yfinance historical (actual run) · git ac11b8068a88dcf3bcd7d66295c80ad741f7c355 · evidence-generated · not investment advice</a:t>
+              <a:t>TIER 2 · yfinance historical (actual run) · git 31a4e495807f486255757cc7a0c85e6e58932771 · evidence-generated · not investment advice</a:t>
             </a:r>
           </a:p>
         </p:txBody>
@@ -4434,7 +4434,7 @@
               </a:defRPr>
             </a:pPr>
             <a:r>
-              <a:t>• Intensity minimized 1.038 → 0.8758 and it STILL fails: True.</a:t>
+              <a:t>• Intensity minimized 1.038 → 0.9285 and it STILL fails: True.</a:t>
             </a:r>
           </a:p>
           <a:p>
@@ -4493,7 +4493,7 @@
               </a:defRPr>
             </a:pPr>
             <a:r>
-              <a:t>TIER 2 · yfinance historical (actual run) · git ac11b8068a88dcf3bcd7d66295c80ad741f7c355 · evidence-generated · not investment advice</a:t>
+              <a:t>TIER 2 · yfinance historical (actual run) · git 31a4e495807f486255757cc7a0c85e6e58932771 · evidence-generated · not investment advice</a:t>
             </a:r>
           </a:p>
         </p:txBody>

--- a/app/static/pitch-deck/fenrix_deck.pptx
+++ b/app/static/pitch-deck/fenrix_deck.pptx
@@ -3206,7 +3206,7 @@
               </a:defRPr>
             </a:pPr>
             <a:r>
-              <a:t>• git SHA: 31a4e495807f486255757cc7a0c85e6e58932771 · data mode of record: yfinance · universe: 30 assets</a:t>
+              <a:t>• git SHA: d6060783173d94586f6ceac10beda05bd34d4d31 · data mode of record: yfinance · universe: 30 assets</a:t>
             </a:r>
           </a:p>
         </p:txBody>
@@ -4147,7 +4147,7 @@
               </a:defRPr>
             </a:pPr>
             <a:r>
-              <a:t>TIER 2 · yfinance historical (actual run) · git 31a4e495807f486255757cc7a0c85e6e58932771 · evidence-generated · not investment advice</a:t>
+              <a:t>TIER 2 · yfinance historical (actual run) · git d6060783173d94586f6ceac10beda05bd34d4d31 · evidence-generated · not investment advice</a:t>
             </a:r>
           </a:p>
         </p:txBody>
@@ -4314,7 +4314,7 @@
               </a:defRPr>
             </a:pPr>
             <a:r>
-              <a:t>TIER 2 · yfinance historical (actual run) · git 31a4e495807f486255757cc7a0c85e6e58932771 · evidence-generated · not investment advice</a:t>
+              <a:t>TIER 2 · yfinance historical (actual run) · git d6060783173d94586f6ceac10beda05bd34d4d31 · evidence-generated · not investment advice</a:t>
             </a:r>
           </a:p>
         </p:txBody>
@@ -4493,7 +4493,7 @@
               </a:defRPr>
             </a:pPr>
             <a:r>
-              <a:t>TIER 2 · yfinance historical (actual run) · git 31a4e495807f486255757cc7a0c85e6e58932771 · evidence-generated · not investment advice</a:t>
+              <a:t>TIER 2 · yfinance historical (actual run) · git d6060783173d94586f6ceac10beda05bd34d4d31 · evidence-generated · not investment advice</a:t>
             </a:r>
           </a:p>
         </p:txBody>

--- a/app/static/pitch-deck/fenrix_deck.pptx
+++ b/app/static/pitch-deck/fenrix_deck.pptx
@@ -3206,7 +3206,7 @@
               </a:defRPr>
             </a:pPr>
             <a:r>
-              <a:t>• git SHA: d6060783173d94586f6ceac10beda05bd34d4d31 · data mode of record: yfinance · universe: 30 assets</a:t>
+              <a:t>• git SHA: d603ecfd5388dbd1b9037d4e7a809c19785112c2 · data mode of record: yfinance · universe: 30 assets</a:t>
             </a:r>
           </a:p>
         </p:txBody>
@@ -4147,7 +4147,7 @@
               </a:defRPr>
             </a:pPr>
             <a:r>
-              <a:t>TIER 2 · yfinance historical (actual run) · git d6060783173d94586f6ceac10beda05bd34d4d31 · evidence-generated · not investment advice</a:t>
+              <a:t>TIER 2 · yfinance historical (actual run) · git d603ecfd5388dbd1b9037d4e7a809c19785112c2 · evidence-generated · not investment advice</a:t>
             </a:r>
           </a:p>
         </p:txBody>
@@ -4314,7 +4314,7 @@
               </a:defRPr>
             </a:pPr>
             <a:r>
-              <a:t>TIER 2 · yfinance historical (actual run) · git d6060783173d94586f6ceac10beda05bd34d4d31 · evidence-generated · not investment advice</a:t>
+              <a:t>TIER 2 · yfinance historical (actual run) · git d603ecfd5388dbd1b9037d4e7a809c19785112c2 · evidence-generated · not investment advice</a:t>
             </a:r>
           </a:p>
         </p:txBody>
@@ -4493,7 +4493,7 @@
               </a:defRPr>
             </a:pPr>
             <a:r>
-              <a:t>TIER 2 · yfinance historical (actual run) · git d6060783173d94586f6ceac10beda05bd34d4d31 · evidence-generated · not investment advice</a:t>
+              <a:t>TIER 2 · yfinance historical (actual run) · git d603ecfd5388dbd1b9037d4e7a809c19785112c2 · evidence-generated · not investment advice</a:t>
             </a:r>
           </a:p>
         </p:txBody>

--- a/app/static/pitch-deck/fenrix_deck.pptx
+++ b/app/static/pitch-deck/fenrix_deck.pptx
@@ -3206,7 +3206,7 @@
               </a:defRPr>
             </a:pPr>
             <a:r>
-              <a:t>• git SHA: d603ecfd5388dbd1b9037d4e7a809c19785112c2 · data mode of record: yfinance · universe: 30 assets</a:t>
+              <a:t>• git SHA: 47b4e9cd36e90b3b7d416fd1fe97bc229402eacb · data mode of record: yfinance · universe: 30 assets</a:t>
             </a:r>
           </a:p>
         </p:txBody>
@@ -4147,7 +4147,7 @@
               </a:defRPr>
             </a:pPr>
             <a:r>
-              <a:t>TIER 2 · yfinance historical (actual run) · git d603ecfd5388dbd1b9037d4e7a809c19785112c2 · evidence-generated · not investment advice</a:t>
+              <a:t>TIER 2 · yfinance historical (actual run) · git 47b4e9cd36e90b3b7d416fd1fe97bc229402eacb · evidence-generated · not investment advice</a:t>
             </a:r>
           </a:p>
         </p:txBody>
@@ -4314,7 +4314,7 @@
               </a:defRPr>
             </a:pPr>
             <a:r>
-              <a:t>TIER 2 · yfinance historical (actual run) · git d603ecfd5388dbd1b9037d4e7a809c19785112c2 · evidence-generated · not investment advice</a:t>
+              <a:t>TIER 2 · yfinance historical (actual run) · git 47b4e9cd36e90b3b7d416fd1fe97bc229402eacb · evidence-generated · not investment advice</a:t>
             </a:r>
           </a:p>
         </p:txBody>
@@ -4493,7 +4493,7 @@
               </a:defRPr>
             </a:pPr>
             <a:r>
-              <a:t>TIER 2 · yfinance historical (actual run) · git d603ecfd5388dbd1b9037d4e7a809c19785112c2 · evidence-generated · not investment advice</a:t>
+              <a:t>TIER 2 · yfinance historical (actual run) · git 47b4e9cd36e90b3b7d416fd1fe97bc229402eacb · evidence-generated · not investment advice</a:t>
             </a:r>
           </a:p>
         </p:txBody>

--- a/app/static/pitch-deck/fenrix_deck.pptx
+++ b/app/static/pitch-deck/fenrix_deck.pptx
@@ -3206,7 +3206,7 @@
               </a:defRPr>
             </a:pPr>
             <a:r>
-              <a:t>• git SHA: 47b4e9cd36e90b3b7d416fd1fe97bc229402eacb · data mode of record: yfinance · universe: 30 assets</a:t>
+              <a:t>• Source code SHA: 43217bab9e4ee9ac10aaa6814cceadd0423beefa · data mode of record: yfinance · universe: 30 assets</a:t>
             </a:r>
           </a:p>
         </p:txBody>
@@ -3667,6 +3667,30 @@
           </a:p>
         </p:txBody>
       </p:sp>
+      <p:pic>
+        <p:nvPicPr>
+          <p:cNvPr id="4" name="Picture 3" descr="interface.png"/>
+          <p:cNvPicPr>
+            <a:picLocks noChangeAspect="1"/>
+          </p:cNvPicPr>
+          <p:nvPr/>
+        </p:nvPicPr>
+        <p:blipFill>
+          <a:blip r:embed="rId2"/>
+          <a:stretch>
+            <a:fillRect/>
+          </a:stretch>
+        </p:blipFill>
+        <p:spPr>
+          <a:xfrm>
+            <a:off x="6309360" y="3749039"/>
+            <a:ext cx="5486400" cy="4521994"/>
+          </a:xfrm>
+          <a:prstGeom prst="rect">
+            <a:avLst/>
+          </a:prstGeom>
+        </p:spPr>
+      </p:pic>
     </p:spTree>
   </p:cSld>
   <p:clrMapOvr>
@@ -4147,7 +4171,7 @@
               </a:defRPr>
             </a:pPr>
             <a:r>
-              <a:t>TIER 2 · yfinance historical (actual run) · git 47b4e9cd36e90b3b7d416fd1fe97bc229402eacb · evidence-generated · not investment advice</a:t>
+              <a:t>TIER 2 · yfinance historical (actual run) · source code 43217bab9e4ee9ac10aaa6814cceadd0423beefa · evidence-generated · not investment advice</a:t>
             </a:r>
           </a:p>
         </p:txBody>
@@ -4282,6 +4306,30 @@
               <a:t>• Confirmed-failure mechanisms: borrow_cost_increase, correlation_breakdown, slippage_inflation, volatility_expansion.</a:t>
             </a:r>
           </a:p>
+          <a:p>
+            <a:pPr>
+              <a:defRPr sz="1500">
+                <a:solidFill>
+                  <a:srgbClr val="E7ECF3"/>
+                </a:solidFill>
+              </a:defRPr>
+            </a:pPr>
+            <a:r>
+              <a:t>• Stress-mechanism result matrix (per mechanism, base seed):</a:t>
+            </a:r>
+          </a:p>
+          <a:p>
+            <a:pPr>
+              <a:defRPr sz="1500">
+                <a:solidFill>
+                  <a:srgbClr val="E7ECF3"/>
+                </a:solidFill>
+              </a:defRPr>
+            </a:pPr>
+            <a:r>
+              <a:t>•   see confirmed-failure mechanisms below</a:t>
+            </a:r>
+          </a:p>
         </p:txBody>
       </p:sp>
       <p:sp>
@@ -4314,7 +4362,7 @@
               </a:defRPr>
             </a:pPr>
             <a:r>
-              <a:t>TIER 2 · yfinance historical (actual run) · git 47b4e9cd36e90b3b7d416fd1fe97bc229402eacb · evidence-generated · not investment advice</a:t>
+              <a:t>TIER 2 · yfinance historical (actual run) · source code 43217bab9e4ee9ac10aaa6814cceadd0423beefa · evidence-generated · not investment advice</a:t>
             </a:r>
           </a:p>
         </p:txBody>
@@ -4422,7 +4470,7 @@
               </a:defRPr>
             </a:pPr>
             <a:r>
-              <a:t>• Mechanism: volatility_expansion · seed 20264.</a:t>
+              <a:t>• Three-world comparison — the failure boundary, shrunk to a minimal reproducible counterexample:</a:t>
             </a:r>
           </a:p>
           <a:p>
@@ -4434,7 +4482,7 @@
               </a:defRPr>
             </a:pPr>
             <a:r>
-              <a:t>• Intensity minimized 1.038 → 0.9285 and it STILL fails: True.</a:t>
+              <a:t>• • BASELINE (Real historical backtest (yfinance)): Sharpe 0.18, cum. return 13.07%.</a:t>
             </a:r>
           </a:p>
           <a:p>
@@ -4446,7 +4494,7 @@
               </a:defRPr>
             </a:pPr>
             <a:r>
-              <a:t>• Violated predicates: n/a.</a:t>
+              <a:t>• • MINIMIZED FAILING WORLD (volatility_expansion @ intensity 0.9285, seed 20264): still fails = True; violated predicates = low_sharpe.</a:t>
             </a:r>
           </a:p>
           <a:p>
@@ -4458,7 +4506,7 @@
               </a:defRPr>
             </a:pPr>
             <a:r>
-              <a:t>• Adjacent pass: no adjacent pass within radius — reported honestly, not fabricated.</a:t>
+              <a:t>• • Adjacent pass: no adjacent pass within radius — reported honestly, not fabricated.</a:t>
             </a:r>
           </a:p>
         </p:txBody>
@@ -4493,7 +4541,7 @@
               </a:defRPr>
             </a:pPr>
             <a:r>
-              <a:t>TIER 2 · yfinance historical (actual run) · git 47b4e9cd36e90b3b7d416fd1fe97bc229402eacb · evidence-generated · not investment advice</a:t>
+              <a:t>TIER 2 · yfinance historical (actual run) · source code 43217bab9e4ee9ac10aaa6814cceadd0423beefa · evidence-generated · not investment advice</a:t>
             </a:r>
           </a:p>
         </p:txBody>

--- a/app/static/pitch-deck/fenrix_deck.pptx
+++ b/app/static/pitch-deck/fenrix_deck.pptx
@@ -3206,7 +3206,7 @@
               </a:defRPr>
             </a:pPr>
             <a:r>
-              <a:t>• Source code SHA: 43217bab9e4ee9ac10aaa6814cceadd0423beefa · data mode of record: yfinance · universe: 30 assets</a:t>
+              <a:t>• Source code SHA: 7fd58bb0eaf1290fdc5ec2844dcda9777a35c242 · data mode of record: yfinance · universe: 30 assets</a:t>
             </a:r>
           </a:p>
         </p:txBody>
@@ -3667,30 +3667,6 @@
           </a:p>
         </p:txBody>
       </p:sp>
-      <p:pic>
-        <p:nvPicPr>
-          <p:cNvPr id="4" name="Picture 3" descr="interface.png"/>
-          <p:cNvPicPr>
-            <a:picLocks noChangeAspect="1"/>
-          </p:cNvPicPr>
-          <p:nvPr/>
-        </p:nvPicPr>
-        <p:blipFill>
-          <a:blip r:embed="rId2"/>
-          <a:stretch>
-            <a:fillRect/>
-          </a:stretch>
-        </p:blipFill>
-        <p:spPr>
-          <a:xfrm>
-            <a:off x="6309360" y="3749039"/>
-            <a:ext cx="5486400" cy="4521994"/>
-          </a:xfrm>
-          <a:prstGeom prst="rect">
-            <a:avLst/>
-          </a:prstGeom>
-        </p:spPr>
-      </p:pic>
     </p:spTree>
   </p:cSld>
   <p:clrMapOvr>
@@ -4171,7 +4147,7 @@
               </a:defRPr>
             </a:pPr>
             <a:r>
-              <a:t>TIER 2 · yfinance historical (actual run) · source code 43217bab9e4ee9ac10aaa6814cceadd0423beefa · evidence-generated · not investment advice</a:t>
+              <a:t>TIER 2 · yfinance historical (actual run) · source code 7fd58bb0eaf1290fdc5ec2844dcda9777a35c242 · evidence-generated · not investment advice</a:t>
             </a:r>
           </a:p>
         </p:txBody>
@@ -4362,7 +4338,7 @@
               </a:defRPr>
             </a:pPr>
             <a:r>
-              <a:t>TIER 2 · yfinance historical (actual run) · source code 43217bab9e4ee9ac10aaa6814cceadd0423beefa · evidence-generated · not investment advice</a:t>
+              <a:t>TIER 2 · yfinance historical (actual run) · source code 7fd58bb0eaf1290fdc5ec2844dcda9777a35c242 · evidence-generated · not investment advice</a:t>
             </a:r>
           </a:p>
         </p:txBody>
@@ -4541,7 +4517,7 @@
               </a:defRPr>
             </a:pPr>
             <a:r>
-              <a:t>TIER 2 · yfinance historical (actual run) · source code 43217bab9e4ee9ac10aaa6814cceadd0423beefa · evidence-generated · not investment advice</a:t>
+              <a:t>TIER 2 · yfinance historical (actual run) · source code 7fd58bb0eaf1290fdc5ec2844dcda9777a35c242 · evidence-generated · not investment advice</a:t>
             </a:r>
           </a:p>
         </p:txBody>

--- a/app/static/pitch-deck/fenrix_deck.pptx
+++ b/app/static/pitch-deck/fenrix_deck.pptx
@@ -3206,7 +3206,7 @@
               </a:defRPr>
             </a:pPr>
             <a:r>
-              <a:t>• Source code SHA: 7fd58bb0eaf1290fdc5ec2844dcda9777a35c242 · data mode of record: yfinance · universe: 30 assets</a:t>
+              <a:t>• Source code SHA: 118ee7b494b31550a773c653d4c948bbd67797c0 · data mode of record: yfinance · universe: 30 assets</a:t>
             </a:r>
           </a:p>
         </p:txBody>
@@ -4147,7 +4147,7 @@
               </a:defRPr>
             </a:pPr>
             <a:r>
-              <a:t>TIER 2 · yfinance historical (actual run) · source code 7fd58bb0eaf1290fdc5ec2844dcda9777a35c242 · evidence-generated · not investment advice</a:t>
+              <a:t>TIER 2 · yfinance historical (actual run) · source code 118ee7b494b31550a773c653d4c948bbd67797c0 · evidence-generated · not investment advice</a:t>
             </a:r>
           </a:p>
         </p:txBody>
@@ -4338,7 +4338,7 @@
               </a:defRPr>
             </a:pPr>
             <a:r>
-              <a:t>TIER 2 · yfinance historical (actual run) · source code 7fd58bb0eaf1290fdc5ec2844dcda9777a35c242 · evidence-generated · not investment advice</a:t>
+              <a:t>TIER 2 · yfinance historical (actual run) · source code 118ee7b494b31550a773c653d4c948bbd67797c0 · evidence-generated · not investment advice</a:t>
             </a:r>
           </a:p>
         </p:txBody>
@@ -4517,7 +4517,7 @@
               </a:defRPr>
             </a:pPr>
             <a:r>
-              <a:t>TIER 2 · yfinance historical (actual run) · source code 7fd58bb0eaf1290fdc5ec2844dcda9777a35c242 · evidence-generated · not investment advice</a:t>
+              <a:t>TIER 2 · yfinance historical (actual run) · source code 118ee7b494b31550a773c653d4c948bbd67797c0 · evidence-generated · not investment advice</a:t>
             </a:r>
           </a:p>
         </p:txBody>

--- a/app/static/pitch-deck/fenrix_deck.pptx
+++ b/app/static/pitch-deck/fenrix_deck.pptx
@@ -3206,7 +3206,7 @@
               </a:defRPr>
             </a:pPr>
             <a:r>
-              <a:t>• Source code SHA: 118ee7b494b31550a773c653d4c948bbd67797c0 · data mode of record: yfinance · universe: 30 assets</a:t>
+              <a:t>• Source code SHA: 5998483efcd9a3d28f7e87d3c477e2a311d6b79e · data mode of record: yfinance · universe: 30 assets</a:t>
             </a:r>
           </a:p>
         </p:txBody>
@@ -4147,7 +4147,7 @@
               </a:defRPr>
             </a:pPr>
             <a:r>
-              <a:t>TIER 2 · yfinance historical (actual run) · source code 118ee7b494b31550a773c653d4c948bbd67797c0 · evidence-generated · not investment advice</a:t>
+              <a:t>TIER 2 · yfinance historical (actual run) · source code 5998483efcd9a3d28f7e87d3c477e2a311d6b79e · evidence-generated · not investment advice</a:t>
             </a:r>
           </a:p>
         </p:txBody>
@@ -4338,7 +4338,7 @@
               </a:defRPr>
             </a:pPr>
             <a:r>
-              <a:t>TIER 2 · yfinance historical (actual run) · source code 118ee7b494b31550a773c653d4c948bbd67797c0 · evidence-generated · not investment advice</a:t>
+              <a:t>TIER 2 · yfinance historical (actual run) · source code 5998483efcd9a3d28f7e87d3c477e2a311d6b79e · evidence-generated · not investment advice</a:t>
             </a:r>
           </a:p>
         </p:txBody>
@@ -4517,7 +4517,7 @@
               </a:defRPr>
             </a:pPr>
             <a:r>
-              <a:t>TIER 2 · yfinance historical (actual run) · source code 118ee7b494b31550a773c653d4c948bbd67797c0 · evidence-generated · not investment advice</a:t>
+              <a:t>TIER 2 · yfinance historical (actual run) · source code 5998483efcd9a3d28f7e87d3c477e2a311d6b79e · evidence-generated · not investment advice</a:t>
             </a:r>
           </a:p>
         </p:txBody>

--- a/app/static/pitch-deck/fenrix_deck.pptx
+++ b/app/static/pitch-deck/fenrix_deck.pptx
@@ -3206,7 +3206,7 @@
               </a:defRPr>
             </a:pPr>
             <a:r>
-              <a:t>• Source code SHA: 5998483efcd9a3d28f7e87d3c477e2a311d6b79e · data mode of record: yfinance · universe: 30 assets</a:t>
+              <a:t>• Source code SHA: 8cc235bde43e8432371221e9ecfba2e6338bd9be · data mode of record: yfinance · universe: 30 assets</a:t>
             </a:r>
           </a:p>
         </p:txBody>
@@ -3667,6 +3667,30 @@
           </a:p>
         </p:txBody>
       </p:sp>
+      <p:pic>
+        <p:nvPicPr>
+          <p:cNvPr id="4" name="Picture 3" descr="interface.png"/>
+          <p:cNvPicPr>
+            <a:picLocks noChangeAspect="1"/>
+          </p:cNvPicPr>
+          <p:nvPr/>
+        </p:nvPicPr>
+        <p:blipFill>
+          <a:blip r:embed="rId2"/>
+          <a:stretch>
+            <a:fillRect/>
+          </a:stretch>
+        </p:blipFill>
+        <p:spPr>
+          <a:xfrm>
+            <a:off x="6309360" y="3749039"/>
+            <a:ext cx="5486400" cy="4521994"/>
+          </a:xfrm>
+          <a:prstGeom prst="rect">
+            <a:avLst/>
+          </a:prstGeom>
+        </p:spPr>
+      </p:pic>
     </p:spTree>
   </p:cSld>
   <p:clrMapOvr>
@@ -4147,7 +4171,7 @@
               </a:defRPr>
             </a:pPr>
             <a:r>
-              <a:t>TIER 2 · yfinance historical (actual run) · source code 5998483efcd9a3d28f7e87d3c477e2a311d6b79e · evidence-generated · not investment advice</a:t>
+              <a:t>TIER 2 · yfinance historical (actual run) · source code 8cc235bde43e8432371221e9ecfba2e6338bd9be · evidence-generated · not investment advice</a:t>
             </a:r>
           </a:p>
         </p:txBody>
@@ -4303,7 +4327,127 @@
               </a:defRPr>
             </a:pPr>
             <a:r>
-              <a:t>•   see confirmed-failure mechanisms below</a:t>
+              <a:t>•   momentum_reversal: pass</a:t>
+            </a:r>
+          </a:p>
+          <a:p>
+            <a:pPr>
+              <a:defRPr sz="1500">
+                <a:solidFill>
+                  <a:srgbClr val="E7ECF3"/>
+                </a:solidFill>
+              </a:defRPr>
+            </a:pPr>
+            <a:r>
+              <a:t>•   volatility_expansion: FAIL (low_sharpe)</a:t>
+            </a:r>
+          </a:p>
+          <a:p>
+            <a:pPr>
+              <a:defRPr sz="1500">
+                <a:solidFill>
+                  <a:srgbClr val="E7ECF3"/>
+                </a:solidFill>
+              </a:defRPr>
+            </a:pPr>
+            <a:r>
+              <a:t>•   correlation_breakdown: FAIL (low_sharpe)</a:t>
+            </a:r>
+          </a:p>
+          <a:p>
+            <a:pPr>
+              <a:defRPr sz="1500">
+                <a:solidFill>
+                  <a:srgbClr val="E7ECF3"/>
+                </a:solidFill>
+              </a:defRPr>
+            </a:pPr>
+            <a:r>
+              <a:t>•   volatility_compression: pass</a:t>
+            </a:r>
+          </a:p>
+          <a:p>
+            <a:pPr>
+              <a:defRPr sz="1500">
+                <a:solidFill>
+                  <a:srgbClr val="E7ECF3"/>
+                </a:solidFill>
+              </a:defRPr>
+            </a:pPr>
+            <a:r>
+              <a:t>•   spread_inflation: pass</a:t>
+            </a:r>
+          </a:p>
+          <a:p>
+            <a:pPr>
+              <a:defRPr sz="1500">
+                <a:solidFill>
+                  <a:srgbClr val="E7ECF3"/>
+                </a:solidFill>
+              </a:defRPr>
+            </a:pPr>
+            <a:r>
+              <a:t>•   slippage_inflation: FAIL (low_sharpe)</a:t>
+            </a:r>
+          </a:p>
+          <a:p>
+            <a:pPr>
+              <a:defRPr sz="1500">
+                <a:solidFill>
+                  <a:srgbClr val="E7ECF3"/>
+                </a:solidFill>
+              </a:defRPr>
+            </a:pPr>
+            <a:r>
+              <a:t>•   borrow_cost_increase: FAIL (low_sharpe)</a:t>
+            </a:r>
+          </a:p>
+          <a:p>
+            <a:pPr>
+              <a:defRPr sz="1500">
+                <a:solidFill>
+                  <a:srgbClr val="E7ECF3"/>
+                </a:solidFill>
+              </a:defRPr>
+            </a:pPr>
+            <a:r>
+              <a:t>•   short_unavailability: pass</a:t>
+            </a:r>
+          </a:p>
+          <a:p>
+            <a:pPr>
+              <a:defRPr sz="1500">
+                <a:solidFill>
+                  <a:srgbClr val="E7ECF3"/>
+                </a:solidFill>
+              </a:defRPr>
+            </a:pPr>
+            <a:r>
+              <a:t>•   delayed_rebalance: pass</a:t>
+            </a:r>
+          </a:p>
+          <a:p>
+            <a:pPr>
+              <a:defRPr sz="1500">
+                <a:solidFill>
+                  <a:srgbClr val="E7ECF3"/>
+                </a:solidFill>
+              </a:defRPr>
+            </a:pPr>
+            <a:r>
+              <a:t>•   universe_churn: pass</a:t>
+            </a:r>
+          </a:p>
+          <a:p>
+            <a:pPr>
+              <a:defRPr sz="1500">
+                <a:solidFill>
+                  <a:srgbClr val="E7ECF3"/>
+                </a:solidFill>
+              </a:defRPr>
+            </a:pPr>
+            <a:r>
+              <a:t>•   missing_data_shock: pass</a:t>
             </a:r>
           </a:p>
         </p:txBody>
@@ -4338,7 +4482,7 @@
               </a:defRPr>
             </a:pPr>
             <a:r>
-              <a:t>TIER 2 · yfinance historical (actual run) · source code 5998483efcd9a3d28f7e87d3c477e2a311d6b79e · evidence-generated · not investment advice</a:t>
+              <a:t>TIER 2 · yfinance historical (actual run) · source code 8cc235bde43e8432371221e9ecfba2e6338bd9be · evidence-generated · not investment advice</a:t>
             </a:r>
           </a:p>
         </p:txBody>
@@ -4446,7 +4590,7 @@
               </a:defRPr>
             </a:pPr>
             <a:r>
-              <a:t>• Three-world comparison — the failure boundary, shrunk to a minimal reproducible counterexample:</a:t>
+              <a:t>• Baseline vs minimized failure — the breaking condition, shrunk to a minimal reproducible counterexample:</a:t>
             </a:r>
           </a:p>
           <a:p>
@@ -4517,7 +4661,7 @@
               </a:defRPr>
             </a:pPr>
             <a:r>
-              <a:t>TIER 2 · yfinance historical (actual run) · source code 5998483efcd9a3d28f7e87d3c477e2a311d6b79e · evidence-generated · not investment advice</a:t>
+              <a:t>TIER 2 · yfinance historical (actual run) · source code 8cc235bde43e8432371221e9ecfba2e6338bd9be · evidence-generated · not investment advice</a:t>
             </a:r>
           </a:p>
         </p:txBody>

--- a/app/static/pitch-deck/fenrix_deck.pptx
+++ b/app/static/pitch-deck/fenrix_deck.pptx
@@ -3206,7 +3206,7 @@
               </a:defRPr>
             </a:pPr>
             <a:r>
-              <a:t>• Source code SHA: 8cc235bde43e8432371221e9ecfba2e6338bd9be · data mode of record: yfinance · universe: 30 assets</a:t>
+              <a:t>• Source code SHA: 8b2140bdb9ff5333b6e457df79c20e43ac9f9738 · data mode of record: yfinance · universe: 30 assets</a:t>
             </a:r>
           </a:p>
         </p:txBody>
@@ -3626,7 +3626,7 @@
               </a:defRPr>
             </a:pPr>
             <a:r>
-              <a:t>• Backtest: the SAME locked hash runs a real multi-asset historical backtest.</a:t>
+              <a:t>• Backtest: the SAME locked hash runs the historical backtest on the run-of-record data (yfinance).</a:t>
             </a:r>
           </a:p>
           <a:p>
@@ -4171,7 +4171,7 @@
               </a:defRPr>
             </a:pPr>
             <a:r>
-              <a:t>TIER 2 · yfinance historical (actual run) · source code 8cc235bde43e8432371221e9ecfba2e6338bd9be · evidence-generated · not investment advice</a:t>
+              <a:t>TIER 2 · yfinance historical (actual run) · source code 8b2140bdb9ff5333b6e457df79c20e43ac9f9738 · evidence-generated · not investment advice</a:t>
             </a:r>
           </a:p>
         </p:txBody>
@@ -4482,7 +4482,7 @@
               </a:defRPr>
             </a:pPr>
             <a:r>
-              <a:t>TIER 2 · yfinance historical (actual run) · source code 8cc235bde43e8432371221e9ecfba2e6338bd9be · evidence-generated · not investment advice</a:t>
+              <a:t>TIER 2 · yfinance historical (actual run) · source code 8b2140bdb9ff5333b6e457df79c20e43ac9f9738 · evidence-generated · not investment advice</a:t>
             </a:r>
           </a:p>
         </p:txBody>
@@ -4661,7 +4661,7 @@
               </a:defRPr>
             </a:pPr>
             <a:r>
-              <a:t>TIER 2 · yfinance historical (actual run) · source code 8cc235bde43e8432371221e9ecfba2e6338bd9be · evidence-generated · not investment advice</a:t>
+              <a:t>TIER 2 · yfinance historical (actual run) · source code 8b2140bdb9ff5333b6e457df79c20e43ac9f9738 · evidence-generated · not investment advice</a:t>
             </a:r>
           </a:p>
         </p:txBody>

--- a/app/static/pitch-deck/fenrix_deck.pptx
+++ b/app/static/pitch-deck/fenrix_deck.pptx
@@ -3206,7 +3206,7 @@
               </a:defRPr>
             </a:pPr>
             <a:r>
-              <a:t>• Source code SHA: 8b2140bdb9ff5333b6e457df79c20e43ac9f9738 · data mode of record: yfinance · universe: 30 assets</a:t>
+              <a:t>• Source code SHA: 21ae3e35bcf847b15c20faee19a577e018448d3e · data mode of record: yfinance · universe: 30 assets</a:t>
             </a:r>
           </a:p>
         </p:txBody>
@@ -4171,7 +4171,7 @@
               </a:defRPr>
             </a:pPr>
             <a:r>
-              <a:t>TIER 2 · yfinance historical (actual run) · source code 8b2140bdb9ff5333b6e457df79c20e43ac9f9738 · evidence-generated · not investment advice</a:t>
+              <a:t>TIER 2 · yfinance historical (actual run) · source code 21ae3e35bcf847b15c20faee19a577e018448d3e · evidence-generated · not investment advice</a:t>
             </a:r>
           </a:p>
         </p:txBody>
@@ -4482,7 +4482,7 @@
               </a:defRPr>
             </a:pPr>
             <a:r>
-              <a:t>TIER 2 · yfinance historical (actual run) · source code 8b2140bdb9ff5333b6e457df79c20e43ac9f9738 · evidence-generated · not investment advice</a:t>
+              <a:t>TIER 2 · yfinance historical (actual run) · source code 21ae3e35bcf847b15c20faee19a577e018448d3e · evidence-generated · not investment advice</a:t>
             </a:r>
           </a:p>
         </p:txBody>
@@ -4661,7 +4661,7 @@
               </a:defRPr>
             </a:pPr>
             <a:r>
-              <a:t>TIER 2 · yfinance historical (actual run) · source code 8b2140bdb9ff5333b6e457df79c20e43ac9f9738 · evidence-generated · not investment advice</a:t>
+              <a:t>TIER 2 · yfinance historical (actual run) · source code 21ae3e35bcf847b15c20faee19a577e018448d3e · evidence-generated · not investment advice</a:t>
             </a:r>
           </a:p>
         </p:txBody>

--- a/app/static/pitch-deck/fenrix_deck.pptx
+++ b/app/static/pitch-deck/fenrix_deck.pptx
@@ -3206,7 +3206,7 @@
               </a:defRPr>
             </a:pPr>
             <a:r>
-              <a:t>• Source code SHA: 21ae3e35bcf847b15c20faee19a577e018448d3e · data mode of record: yfinance · universe: 30 assets</a:t>
+              <a:t>• Source code SHA: e9b902f10f74e74f9bda9dabaf7043f16b7ed068 · data mode of record: yfinance · universe: 30 assets</a:t>
             </a:r>
           </a:p>
         </p:txBody>
@@ -4171,7 +4171,7 @@
               </a:defRPr>
             </a:pPr>
             <a:r>
-              <a:t>TIER 2 · yfinance historical (actual run) · source code 21ae3e35bcf847b15c20faee19a577e018448d3e · evidence-generated · not investment advice</a:t>
+              <a:t>TIER 2 · yfinance historical (actual run) · source code e9b902f10f74e74f9bda9dabaf7043f16b7ed068 · evidence-generated · not investment advice</a:t>
             </a:r>
           </a:p>
         </p:txBody>
@@ -4482,7 +4482,7 @@
               </a:defRPr>
             </a:pPr>
             <a:r>
-              <a:t>TIER 2 · yfinance historical (actual run) · source code 21ae3e35bcf847b15c20faee19a577e018448d3e · evidence-generated · not investment advice</a:t>
+              <a:t>TIER 2 · yfinance historical (actual run) · source code e9b902f10f74e74f9bda9dabaf7043f16b7ed068 · evidence-generated · not investment advice</a:t>
             </a:r>
           </a:p>
         </p:txBody>
@@ -4661,7 +4661,7 @@
               </a:defRPr>
             </a:pPr>
             <a:r>
-              <a:t>TIER 2 · yfinance historical (actual run) · source code 21ae3e35bcf847b15c20faee19a577e018448d3e · evidence-generated · not investment advice</a:t>
+              <a:t>TIER 2 · yfinance historical (actual run) · source code e9b902f10f74e74f9bda9dabaf7043f16b7ed068 · evidence-generated · not investment advice</a:t>
             </a:r>
           </a:p>
         </p:txBody>

--- a/app/static/pitch-deck/fenrix_deck.pptx
+++ b/app/static/pitch-deck/fenrix_deck.pptx
@@ -3206,7 +3206,7 @@
               </a:defRPr>
             </a:pPr>
             <a:r>
-              <a:t>• Source code SHA: e9b902f10f74e74f9bda9dabaf7043f16b7ed068 · data mode of record: yfinance · universe: 30 assets</a:t>
+              <a:t>• Source code SHA: 83bbe5f262d7bbac0f4ce43890dc8e064f8b7a90 · data mode of record: yfinance · universe: 30 assets</a:t>
             </a:r>
           </a:p>
         </p:txBody>
@@ -4171,7 +4171,7 @@
               </a:defRPr>
             </a:pPr>
             <a:r>
-              <a:t>TIER 2 · yfinance historical (actual run) · source code e9b902f10f74e74f9bda9dabaf7043f16b7ed068 · evidence-generated · not investment advice</a:t>
+              <a:t>TIER 2 · yfinance historical (actual run) · source code 83bbe5f262d7bbac0f4ce43890dc8e064f8b7a90 · evidence-generated · not investment advice</a:t>
             </a:r>
           </a:p>
         </p:txBody>
@@ -4244,7 +4244,7 @@
               </a:defRPr>
             </a:pPr>
             <a:r>
-              <a:t>Baseline vs confirmed stress failure</a:t>
+              <a:t>Sealed stress search — per-mechanism pass/fail (base seed)</a:t>
             </a:r>
           </a:p>
         </p:txBody>
@@ -4315,139 +4315,7 @@
               </a:defRPr>
             </a:pPr>
             <a:r>
-              <a:t>• Stress-mechanism result matrix (per mechanism, base seed):</a:t>
-            </a:r>
-          </a:p>
-          <a:p>
-            <a:pPr>
-              <a:defRPr sz="1500">
-                <a:solidFill>
-                  <a:srgbClr val="E7ECF3"/>
-                </a:solidFill>
-              </a:defRPr>
-            </a:pPr>
-            <a:r>
-              <a:t>•   momentum_reversal: pass</a:t>
-            </a:r>
-          </a:p>
-          <a:p>
-            <a:pPr>
-              <a:defRPr sz="1500">
-                <a:solidFill>
-                  <a:srgbClr val="E7ECF3"/>
-                </a:solidFill>
-              </a:defRPr>
-            </a:pPr>
-            <a:r>
-              <a:t>•   volatility_expansion: FAIL (low_sharpe)</a:t>
-            </a:r>
-          </a:p>
-          <a:p>
-            <a:pPr>
-              <a:defRPr sz="1500">
-                <a:solidFill>
-                  <a:srgbClr val="E7ECF3"/>
-                </a:solidFill>
-              </a:defRPr>
-            </a:pPr>
-            <a:r>
-              <a:t>•   correlation_breakdown: FAIL (low_sharpe)</a:t>
-            </a:r>
-          </a:p>
-          <a:p>
-            <a:pPr>
-              <a:defRPr sz="1500">
-                <a:solidFill>
-                  <a:srgbClr val="E7ECF3"/>
-                </a:solidFill>
-              </a:defRPr>
-            </a:pPr>
-            <a:r>
-              <a:t>•   volatility_compression: pass</a:t>
-            </a:r>
-          </a:p>
-          <a:p>
-            <a:pPr>
-              <a:defRPr sz="1500">
-                <a:solidFill>
-                  <a:srgbClr val="E7ECF3"/>
-                </a:solidFill>
-              </a:defRPr>
-            </a:pPr>
-            <a:r>
-              <a:t>•   spread_inflation: pass</a:t>
-            </a:r>
-          </a:p>
-          <a:p>
-            <a:pPr>
-              <a:defRPr sz="1500">
-                <a:solidFill>
-                  <a:srgbClr val="E7ECF3"/>
-                </a:solidFill>
-              </a:defRPr>
-            </a:pPr>
-            <a:r>
-              <a:t>•   slippage_inflation: FAIL (low_sharpe)</a:t>
-            </a:r>
-          </a:p>
-          <a:p>
-            <a:pPr>
-              <a:defRPr sz="1500">
-                <a:solidFill>
-                  <a:srgbClr val="E7ECF3"/>
-                </a:solidFill>
-              </a:defRPr>
-            </a:pPr>
-            <a:r>
-              <a:t>•   borrow_cost_increase: FAIL (low_sharpe)</a:t>
-            </a:r>
-          </a:p>
-          <a:p>
-            <a:pPr>
-              <a:defRPr sz="1500">
-                <a:solidFill>
-                  <a:srgbClr val="E7ECF3"/>
-                </a:solidFill>
-              </a:defRPr>
-            </a:pPr>
-            <a:r>
-              <a:t>•   short_unavailability: pass</a:t>
-            </a:r>
-          </a:p>
-          <a:p>
-            <a:pPr>
-              <a:defRPr sz="1500">
-                <a:solidFill>
-                  <a:srgbClr val="E7ECF3"/>
-                </a:solidFill>
-              </a:defRPr>
-            </a:pPr>
-            <a:r>
-              <a:t>•   delayed_rebalance: pass</a:t>
-            </a:r>
-          </a:p>
-          <a:p>
-            <a:pPr>
-              <a:defRPr sz="1500">
-                <a:solidFill>
-                  <a:srgbClr val="E7ECF3"/>
-                </a:solidFill>
-              </a:defRPr>
-            </a:pPr>
-            <a:r>
-              <a:t>•   universe_churn: pass</a:t>
-            </a:r>
-          </a:p>
-          <a:p>
-            <a:pPr>
-              <a:defRPr sz="1500">
-                <a:solidFill>
-                  <a:srgbClr val="E7ECF3"/>
-                </a:solidFill>
-              </a:defRPr>
-            </a:pPr>
-            <a:r>
-              <a:t>•   missing_data_shock: pass</a:t>
+              <a:t>• Worst confirmed stress case (volatility_expansion): Sharpe 0.20, max drawdown -0.66%, cost 0.10% of capital — invisible to the plain backtest.</a:t>
             </a:r>
           </a:p>
         </p:txBody>
@@ -4455,6 +4323,173 @@
       <p:sp>
         <p:nvSpPr>
           <p:cNvPr id="4" name="TextBox 3"/>
+          <p:cNvSpPr txBox="1"/>
+          <p:nvPr/>
+        </p:nvSpPr>
+        <p:spPr>
+          <a:xfrm>
+            <a:off x="548640" y="3246120"/>
+            <a:ext cx="11064240" cy="2788919"/>
+          </a:xfrm>
+          <a:prstGeom prst="rect">
+            <a:avLst/>
+          </a:prstGeom>
+          <a:noFill/>
+        </p:spPr>
+        <p:txBody>
+          <a:bodyPr wrap="square">
+            <a:spAutoFit/>
+          </a:bodyPr>
+          <a:lstStyle/>
+          <a:p>
+            <a:pPr>
+              <a:defRPr sz="1300" b="1">
+                <a:solidFill>
+                  <a:srgbClr val="7FD1FF"/>
+                </a:solidFill>
+              </a:defRPr>
+            </a:pPr>
+            <a:r>
+              <a:t>Per-mechanism result (base seed):</a:t>
+            </a:r>
+          </a:p>
+          <a:p>
+            <a:pPr>
+              <a:defRPr sz="1300">
+                <a:solidFill>
+                  <a:srgbClr val="9AFFC4"/>
+                </a:solidFill>
+              </a:defRPr>
+            </a:pPr>
+            <a:r>
+              <a:t>• momentum_reversal: pass</a:t>
+            </a:r>
+          </a:p>
+          <a:p>
+            <a:pPr>
+              <a:defRPr sz="1300">
+                <a:solidFill>
+                  <a:srgbClr val="FF6B6B"/>
+                </a:solidFill>
+              </a:defRPr>
+            </a:pPr>
+            <a:r>
+              <a:t>• volatility_expansion: FAIL (low_sharpe)</a:t>
+            </a:r>
+          </a:p>
+          <a:p>
+            <a:pPr>
+              <a:defRPr sz="1300">
+                <a:solidFill>
+                  <a:srgbClr val="FF6B6B"/>
+                </a:solidFill>
+              </a:defRPr>
+            </a:pPr>
+            <a:r>
+              <a:t>• correlation_breakdown: FAIL (low_sharpe)</a:t>
+            </a:r>
+          </a:p>
+          <a:p>
+            <a:pPr>
+              <a:defRPr sz="1300">
+                <a:solidFill>
+                  <a:srgbClr val="9AFFC4"/>
+                </a:solidFill>
+              </a:defRPr>
+            </a:pPr>
+            <a:r>
+              <a:t>• volatility_compression: pass</a:t>
+            </a:r>
+          </a:p>
+          <a:p>
+            <a:pPr>
+              <a:defRPr sz="1300">
+                <a:solidFill>
+                  <a:srgbClr val="9AFFC4"/>
+                </a:solidFill>
+              </a:defRPr>
+            </a:pPr>
+            <a:r>
+              <a:t>• spread_inflation: pass</a:t>
+            </a:r>
+          </a:p>
+          <a:p>
+            <a:pPr>
+              <a:defRPr sz="1300">
+                <a:solidFill>
+                  <a:srgbClr val="FF6B6B"/>
+                </a:solidFill>
+              </a:defRPr>
+            </a:pPr>
+            <a:r>
+              <a:t>• slippage_inflation: FAIL (low_sharpe)</a:t>
+            </a:r>
+          </a:p>
+          <a:p>
+            <a:pPr>
+              <a:defRPr sz="1300">
+                <a:solidFill>
+                  <a:srgbClr val="FF6B6B"/>
+                </a:solidFill>
+              </a:defRPr>
+            </a:pPr>
+            <a:r>
+              <a:t>• borrow_cost_increase: FAIL (low_sharpe)</a:t>
+            </a:r>
+          </a:p>
+          <a:p>
+            <a:pPr>
+              <a:defRPr sz="1300">
+                <a:solidFill>
+                  <a:srgbClr val="9AFFC4"/>
+                </a:solidFill>
+              </a:defRPr>
+            </a:pPr>
+            <a:r>
+              <a:t>• short_unavailability: pass</a:t>
+            </a:r>
+          </a:p>
+          <a:p>
+            <a:pPr>
+              <a:defRPr sz="1300">
+                <a:solidFill>
+                  <a:srgbClr val="9AFFC4"/>
+                </a:solidFill>
+              </a:defRPr>
+            </a:pPr>
+            <a:r>
+              <a:t>• delayed_rebalance: pass</a:t>
+            </a:r>
+          </a:p>
+          <a:p>
+            <a:pPr>
+              <a:defRPr sz="1300">
+                <a:solidFill>
+                  <a:srgbClr val="9AFFC4"/>
+                </a:solidFill>
+              </a:defRPr>
+            </a:pPr>
+            <a:r>
+              <a:t>• universe_churn: pass</a:t>
+            </a:r>
+          </a:p>
+          <a:p>
+            <a:pPr>
+              <a:defRPr sz="1300">
+                <a:solidFill>
+                  <a:srgbClr val="9AFFC4"/>
+                </a:solidFill>
+              </a:defRPr>
+            </a:pPr>
+            <a:r>
+              <a:t>• missing_data_shock: pass</a:t>
+            </a:r>
+          </a:p>
+        </p:txBody>
+      </p:sp>
+      <p:sp>
+        <p:nvSpPr>
+          <p:cNvPr id="5" name="TextBox 4"/>
           <p:cNvSpPr txBox="1"/>
           <p:nvPr/>
         </p:nvSpPr>
@@ -4482,7 +4517,7 @@
               </a:defRPr>
             </a:pPr>
             <a:r>
-              <a:t>TIER 2 · yfinance historical (actual run) · source code e9b902f10f74e74f9bda9dabaf7043f16b7ed068 · evidence-generated · not investment advice</a:t>
+              <a:t>TIER 2 · yfinance historical (actual run) · source code 83bbe5f262d7bbac0f4ce43890dc8e064f8b7a90 · evidence-generated · not investment advice</a:t>
             </a:r>
           </a:p>
         </p:txBody>
@@ -4626,6 +4661,18 @@
               </a:defRPr>
             </a:pPr>
             <a:r>
+              <a:t>•   minimized-case metrics: Sharpe 0.20, cum. return 0.69%, max DD -0.66%, cost 0.10% of capital.</a:t>
+            </a:r>
+          </a:p>
+          <a:p>
+            <a:pPr>
+              <a:defRPr sz="1500">
+                <a:solidFill>
+                  <a:srgbClr val="E7ECF3"/>
+                </a:solidFill>
+              </a:defRPr>
+            </a:pPr>
+            <a:r>
               <a:t>• • Adjacent pass: no adjacent pass within radius — reported honestly, not fabricated.</a:t>
             </a:r>
           </a:p>
@@ -4661,7 +4708,7 @@
               </a:defRPr>
             </a:pPr>
             <a:r>
-              <a:t>TIER 2 · yfinance historical (actual run) · source code e9b902f10f74e74f9bda9dabaf7043f16b7ed068 · evidence-generated · not investment advice</a:t>
+              <a:t>TIER 2 · yfinance historical (actual run) · source code 83bbe5f262d7bbac0f4ce43890dc8e064f8b7a90 · evidence-generated · not investment advice</a:t>
             </a:r>
           </a:p>
         </p:txBody>
